--- a/system-design-101/vi/lessons/sd-05-003/slides/sd-05-003.pptx
+++ b/system-design-101/vi/lessons/sd-05-003/slides/sd-05-003.pptx
@@ -13231,7 +13231,7 @@
               <a:buNone/>
             </a:pPr>
             <a:r>
-              <a:rPr lang="en-US" sz="6300" dirty="0" spc="2" kern="0">
+              <a:rPr lang="en-US" sz="6900" dirty="0" spc="2" kern="0">
                 <a:solidFill>
                   <a:srgbClr val="14161C"/>
                 </a:solidFill>
@@ -13239,10 +13239,10 @@
                 <a:ea typeface="Bricolage Grotesque ExtraBold" pitchFamily="34" charset="-122"/>
                 <a:cs typeface="Bricolage Grotesque ExtraBold" pitchFamily="34" charset="-120"/>
               </a:rPr>
-              <a:t>Phần</a:t>
-            </a:r>
-            <a:r>
-              <a:rPr lang="en-US" sz="6300" dirty="0" spc="1" kern="0">
+              <a:t>Phần nào</a:t>
+            </a:r>
+            <a:r>
+              <a:rPr lang="en-US" sz="6900" dirty="0" spc="1" kern="0">
                 <a:solidFill>
                   <a:srgbClr val="14161C"/>
                 </a:solidFill>
@@ -13250,10 +13250,10 @@
                 <a:ea typeface="Bricolage Grotesque ExtraBold" pitchFamily="34" charset="-122"/>
                 <a:cs typeface="Bricolage Grotesque ExtraBold" pitchFamily="34" charset="-120"/>
               </a:rPr>
-              <a:t> nào</a:t>
-            </a:r>
-            <a:r>
-              <a:rPr lang="en-US" sz="6300" dirty="0" spc="4" kern="0">
+              <a:t> nằm</a:t>
+            </a:r>
+            <a:r>
+              <a:rPr lang="en-US" sz="6900" dirty="0" spc="-13" kern="0">
                 <a:solidFill>
                   <a:srgbClr val="14161C"/>
                 </a:solidFill>
@@ -13261,10 +13261,10 @@
                 <a:ea typeface="Bricolage Grotesque ExtraBold" pitchFamily="34" charset="-122"/>
                 <a:cs typeface="Bricolage Grotesque ExtraBold" pitchFamily="34" charset="-120"/>
               </a:rPr>
-              <a:t> nằm</a:t>
-            </a:r>
-            <a:r>
-              <a:rPr lang="en-US" sz="6300" dirty="0" spc="-13" kern="0">
+              <a:t> trong</a:t>
+            </a:r>
+            <a:r>
+              <a:rPr lang="en-US" sz="6900" dirty="0" spc="0" kern="0">
                 <a:solidFill>
                   <a:srgbClr val="14161C"/>
                 </a:solidFill>
@@ -13272,10 +13272,10 @@
                 <a:ea typeface="Bricolage Grotesque ExtraBold" pitchFamily="34" charset="-122"/>
                 <a:cs typeface="Bricolage Grotesque ExtraBold" pitchFamily="34" charset="-120"/>
               </a:rPr>
-              <a:t> trong</a:t>
-            </a:r>
-            <a:r>
-              <a:rPr lang="en-US" sz="6300" dirty="0" spc="1" kern="0">
+              <a:t> dòng</a:t>
+            </a:r>
+            <a:r>
+              <a:rPr lang="en-US" sz="6900" dirty="0" spc="4" kern="0">
                 <a:solidFill>
                   <a:srgbClr val="14161C"/>
                 </a:solidFill>
@@ -13283,20 +13283,9 @@
                 <a:ea typeface="Bricolage Grotesque ExtraBold" pitchFamily="34" charset="-122"/>
                 <a:cs typeface="Bricolage Grotesque ExtraBold" pitchFamily="34" charset="-120"/>
               </a:rPr>
-              <a:t> dòng</a:t>
-            </a:r>
-            <a:r>
-              <a:rPr lang="en-US" sz="6300" dirty="0" spc="4" kern="0">
-                <a:solidFill>
-                  <a:srgbClr val="14161C"/>
-                </a:solidFill>
-                <a:latin typeface="Bricolage Grotesque ExtraBold" pitchFamily="34" charset="0"/>
-                <a:ea typeface="Bricolage Grotesque ExtraBold" pitchFamily="34" charset="-122"/>
-                <a:cs typeface="Bricolage Grotesque ExtraBold" pitchFamily="34" charset="-120"/>
-              </a:rPr>
               <a:t> đầu?</a:t>
             </a:r>
-            <a:endParaRPr lang="en-US" sz="6300" dirty="0"/>
+            <a:endParaRPr lang="en-US" sz="6900" dirty="0"/>
           </a:p>
         </p:txBody>
       </p:sp>

--- a/system-design-101/vi/lessons/sd-05-003/slides/sd-05-003.pptx
+++ b/system-design-101/vi/lessons/sd-05-003/slides/sd-05-003.pptx
@@ -1933,6 +1933,39 @@
               <a:buNone/>
             </a:pPr>
             <a:r>
+              <a:rPr lang="en-US" sz="3000" dirty="0" spc="-4" kern="0">
+                <a:solidFill>
+                  <a:srgbClr val="E4E1D8"/>
+                </a:solidFill>
+                <a:latin typeface="Be Vietnam Pro" pitchFamily="34" charset="0"/>
+                <a:ea typeface="Be Vietnam Pro" pitchFamily="34" charset="-122"/>
+                <a:cs typeface="Be Vietnam Pro" pitchFamily="34" charset="-120"/>
+              </a:rPr>
+              <a:t>Phần</a:t>
+            </a:r>
+            <a:r>
+              <a:rPr lang="en-US" sz="3000" dirty="0" spc="-1" kern="0">
+                <a:solidFill>
+                  <a:srgbClr val="E4E1D8"/>
+                </a:solidFill>
+                <a:latin typeface="Be Vietnam Pro" pitchFamily="34" charset="0"/>
+                <a:ea typeface="Be Vietnam Pro" pitchFamily="34" charset="-122"/>
+                <a:cs typeface="Be Vietnam Pro" pitchFamily="34" charset="-120"/>
+              </a:rPr>
+              <a:t> nào</a:t>
+            </a:r>
+            <a:r>
+              <a:rPr lang="en-US" sz="3000" dirty="0" spc="0" kern="0">
+                <a:solidFill>
+                  <a:srgbClr val="E4E1D8"/>
+                </a:solidFill>
+                <a:latin typeface="Be Vietnam Pro" pitchFamily="34" charset="0"/>
+                <a:ea typeface="Be Vietnam Pro" pitchFamily="34" charset="-122"/>
+                <a:cs typeface="Be Vietnam Pro" pitchFamily="34" charset="-120"/>
+              </a:rPr>
+              <a:t> của</a:t>
+            </a:r>
+            <a:r>
               <a:rPr lang="en-US" sz="3000" dirty="0" spc="1" kern="0">
                 <a:solidFill>
                   <a:srgbClr val="E4E1D8"/>
@@ -1941,10 +1974,10 @@
                 <a:ea typeface="Be Vietnam Pro" pitchFamily="34" charset="-122"/>
                 <a:cs typeface="Be Vietnam Pro" pitchFamily="34" charset="-120"/>
               </a:rPr>
-              <a:t>Không phải</a:t>
-            </a:r>
-            <a:r>
-              <a:rPr lang="en-US" sz="3000" dirty="0" spc="0" kern="0">
+              <a:t> URL không</a:t>
+            </a:r>
+            <a:r>
+              <a:rPr lang="en-US" sz="3000" dirty="0" spc="-12" kern="0">
                 <a:solidFill>
                   <a:srgbClr val="E4E1D8"/>
                 </a:solidFill>
@@ -1952,10 +1985,10 @@
                 <a:ea typeface="Be Vietnam Pro" pitchFamily="34" charset="-122"/>
                 <a:cs typeface="Be Vietnam Pro" pitchFamily="34" charset="-120"/>
               </a:rPr>
-              <a:t> phần</a:t>
-            </a:r>
-            <a:r>
-              <a:rPr lang="en-US" sz="3000" dirty="0" spc="-2" kern="0">
+              <a:t> tới</a:t>
+            </a:r>
+            <a:r>
+              <a:rPr lang="en-US" sz="3000" dirty="0" spc="-11" kern="0">
                 <a:solidFill>
                   <a:srgbClr val="E4E1D8"/>
                 </a:solidFill>
@@ -1963,10 +1996,10 @@
                 <a:ea typeface="Be Vietnam Pro" pitchFamily="34" charset="-122"/>
                 <a:cs typeface="Be Vietnam Pro" pitchFamily="34" charset="-120"/>
               </a:rPr>
-              <a:t> nào</a:t>
-            </a:r>
-            <a:r>
-              <a:rPr lang="en-US" sz="3000" dirty="0" spc="1" kern="0">
+              <a:t> máy</a:t>
+            </a:r>
+            <a:r>
+              <a:rPr lang="en-US" sz="3000" dirty="0" spc="-1" kern="0">
                 <a:solidFill>
                   <a:srgbClr val="E4E1D8"/>
                 </a:solidFill>
@@ -1974,51 +2007,7 @@
                 <a:ea typeface="Be Vietnam Pro" pitchFamily="34" charset="-122"/>
                 <a:cs typeface="Be Vietnam Pro" pitchFamily="34" charset="-120"/>
               </a:rPr>
-              <a:t> của URL</a:t>
-            </a:r>
-            <a:r>
-              <a:rPr lang="en-US" sz="3000" dirty="0" spc="0" kern="0">
-                <a:solidFill>
-                  <a:srgbClr val="E4E1D8"/>
-                </a:solidFill>
-                <a:latin typeface="Be Vietnam Pro" pitchFamily="34" charset="0"/>
-                <a:ea typeface="Be Vietnam Pro" pitchFamily="34" charset="-122"/>
-                <a:cs typeface="Be Vietnam Pro" pitchFamily="34" charset="-120"/>
-              </a:rPr>
-              <a:t> cũng</a:t>
-            </a:r>
-            <a:r>
-              <a:rPr lang="en-US" sz="3000" dirty="0" spc="-13" kern="0">
-                <a:solidFill>
-                  <a:srgbClr val="E4E1D8"/>
-                </a:solidFill>
-                <a:latin typeface="Be Vietnam Pro" pitchFamily="34" charset="0"/>
-                <a:ea typeface="Be Vietnam Pro" pitchFamily="34" charset="-122"/>
-                <a:cs typeface="Be Vietnam Pro" pitchFamily="34" charset="-120"/>
-              </a:rPr>
-              <a:t> tới</a:t>
-            </a:r>
-            <a:r>
-              <a:rPr lang="en-US" sz="3000" dirty="0" spc="-11" kern="0">
-                <a:solidFill>
-                  <a:srgbClr val="E4E1D8"/>
-                </a:solidFill>
-                <a:latin typeface="Be Vietnam Pro" pitchFamily="34" charset="0"/>
-                <a:ea typeface="Be Vietnam Pro" pitchFamily="34" charset="-122"/>
-                <a:cs typeface="Be Vietnam Pro" pitchFamily="34" charset="-120"/>
-              </a:rPr>
-              <a:t> máy</a:t>
-            </a:r>
-            <a:r>
-              <a:rPr lang="en-US" sz="3000" dirty="0" spc="0" kern="0">
-                <a:solidFill>
-                  <a:srgbClr val="E4E1D8"/>
-                </a:solidFill>
-                <a:latin typeface="Be Vietnam Pro" pitchFamily="34" charset="0"/>
-                <a:ea typeface="Be Vietnam Pro" pitchFamily="34" charset="-122"/>
-                <a:cs typeface="Be Vietnam Pro" pitchFamily="34" charset="-120"/>
-              </a:rPr>
-              <a:t> chủ.</a:t>
+              <a:t> chủ?</a:t>
             </a:r>
             <a:endParaRPr lang="en-US" sz="3000" dirty="0"/>
           </a:p>
@@ -4692,7 +4681,7 @@
               <a:t> ngày</a:t>
             </a:r>
             <a:r>
-              <a:rPr lang="en-US" sz="1800" dirty="0" spc="1" kern="0">
+              <a:rPr lang="en-US" sz="1800" dirty="0" spc="0" kern="0">
                 <a:solidFill>
                   <a:srgbClr val="9AA0B5"/>
                 </a:solidFill>
@@ -4700,10 +4689,10 @@
                 <a:ea typeface="Be Vietnam Pro" pitchFamily="34" charset="-122"/>
                 <a:cs typeface="Be Vietnam Pro" pitchFamily="34" charset="-120"/>
               </a:rPr>
-              <a:t> 2026-10-13.</a:t>
-            </a:r>
-            <a:r>
-              <a:rPr lang="en-US" sz="1800" dirty="0" spc="-49" kern="0">
+              <a:t> 2026-10-13;</a:t>
+            </a:r>
+            <a:r>
+              <a:rPr lang="en-US" sz="1800" dirty="0" spc="-18" kern="0">
                 <a:solidFill>
                   <a:srgbClr val="9AA0B5"/>
                 </a:solidFill>
@@ -4711,10 +4700,10 @@
                 <a:ea typeface="Be Vietnam Pro" pitchFamily="34" charset="-122"/>
                 <a:cs typeface="Be Vietnam Pro" pitchFamily="34" charset="-120"/>
               </a:rPr>
-              <a:t> Yêu</a:t>
-            </a:r>
-            <a:r>
-              <a:rPr lang="en-US" sz="1800" dirty="0" spc="-1" kern="0">
+              <a:t> yêu</a:t>
+            </a:r>
+            <a:r>
+              <a:rPr lang="en-US" sz="1800" dirty="0" spc="0" kern="0">
                 <a:solidFill>
                   <a:srgbClr val="9AA0B5"/>
                 </a:solidFill>
@@ -4725,7 +4714,7 @@
               <a:t> cầu</a:t>
             </a:r>
             <a:r>
-              <a:rPr lang="en-US" sz="1800" dirty="0" spc="-2" kern="0">
+              <a:rPr lang="en-US" sz="1800" dirty="0" spc="-3" kern="0">
                 <a:solidFill>
                   <a:srgbClr val="9AA0B5"/>
                 </a:solidFill>
@@ -4747,7 +4736,7 @@
               <a:t> bắt</a:t>
             </a:r>
             <a:r>
-              <a:rPr lang="en-US" sz="1800" dirty="0" spc="-1" kern="0">
+              <a:rPr lang="en-US" sz="1800" dirty="0" spc="-4" kern="0">
                 <a:solidFill>
                   <a:srgbClr val="9AA0B5"/>
                 </a:solidFill>
@@ -4755,10 +4744,10 @@
                 <a:ea typeface="Be Vietnam Pro" pitchFamily="34" charset="-122"/>
                 <a:cs typeface="Be Vietnam Pro" pitchFamily="34" charset="-120"/>
               </a:rPr>
-              <a:t> lại</a:t>
-            </a:r>
-            <a:r>
-              <a:rPr lang="en-US" sz="1800" dirty="0" spc="-4" kern="0">
+              <a:t> bằng</a:t>
+            </a:r>
+            <a:r>
+              <a:rPr lang="en-US" sz="1800" dirty="0" spc="0" kern="0">
                 <a:solidFill>
                   <a:srgbClr val="9AA0B5"/>
                 </a:solidFill>
@@ -4766,10 +4755,10 @@
                 <a:ea typeface="Be Vietnam Pro" pitchFamily="34" charset="-122"/>
                 <a:cs typeface="Be Vietnam Pro" pitchFamily="34" charset="-120"/>
               </a:rPr>
-              <a:t> bằng</a:t>
-            </a:r>
-            <a:r>
-              <a:rPr lang="en-US" sz="1800" dirty="0" spc="1" kern="0">
+              <a:t> curl</a:t>
+            </a:r>
+            <a:r>
+              <a:rPr lang="en-US" sz="1800" dirty="0" spc="3" kern="0">
                 <a:solidFill>
                   <a:srgbClr val="9AA0B5"/>
                 </a:solidFill>
@@ -4777,73 +4766,7 @@
                 <a:ea typeface="Be Vietnam Pro" pitchFamily="34" charset="-122"/>
                 <a:cs typeface="Be Vietnam Pro" pitchFamily="34" charset="-120"/>
               </a:rPr>
-              <a:t> curl</a:t>
-            </a:r>
-            <a:r>
-              <a:rPr lang="en-US" sz="1800" dirty="0" spc="2" kern="0">
-                <a:solidFill>
-                  <a:srgbClr val="9AA0B5"/>
-                </a:solidFill>
-                <a:latin typeface="Be Vietnam Pro" pitchFamily="34" charset="0"/>
-                <a:ea typeface="Be Vietnam Pro" pitchFamily="34" charset="-122"/>
-                <a:cs typeface="Be Vietnam Pro" pitchFamily="34" charset="-120"/>
-              </a:rPr>
               <a:t> 8.5.0.</a:t>
-            </a:r>
-            <a:r>
-              <a:rPr lang="en-US" sz="1800" dirty="0" spc="-1" kern="0">
-                <a:solidFill>
-                  <a:srgbClr val="9AA0B5"/>
-                </a:solidFill>
-                <a:latin typeface="Be Vietnam Pro" pitchFamily="34" charset="0"/>
-                <a:ea typeface="Be Vietnam Pro" pitchFamily="34" charset="-122"/>
-                <a:cs typeface="Be Vietnam Pro" pitchFamily="34" charset="-120"/>
-              </a:rPr>
-              <a:t> Hình</a:t>
-            </a:r>
-            <a:r>
-              <a:rPr lang="en-US" sz="1800" dirty="0" spc="-5" kern="0">
-                <a:solidFill>
-                  <a:srgbClr val="9AA0B5"/>
-                </a:solidFill>
-                <a:latin typeface="Be Vietnam Pro" pitchFamily="34" charset="0"/>
-                <a:ea typeface="Be Vietnam Pro" pitchFamily="34" charset="-122"/>
-                <a:cs typeface="Be Vietnam Pro" pitchFamily="34" charset="-120"/>
-              </a:rPr>
-              <a:t> thiết</a:t>
-            </a:r>
-            <a:r>
-              <a:rPr lang="en-US" sz="1800" dirty="0" spc="-28" kern="0">
-                <a:solidFill>
-                  <a:srgbClr val="9AA0B5"/>
-                </a:solidFill>
-                <a:latin typeface="Be Vietnam Pro" pitchFamily="34" charset="0"/>
-                <a:ea typeface="Be Vietnam Pro" pitchFamily="34" charset="-122"/>
-                <a:cs typeface="Be Vietnam Pro" pitchFamily="34" charset="-120"/>
-              </a:rPr>
-              <a:t> kế</a:t>
-            </a:r>
-            <a:r>
-              <a:rPr lang="en-US" sz="1800" dirty="0" spc="8" kern="0">
-                <a:solidFill>
-                  <a:srgbClr val="9AA0B5"/>
-                </a:solidFill>
-                <a:latin typeface="Be Vietnam Pro" pitchFamily="34" charset="0"/>
-                <a:ea typeface="Be Vietnam Pro" pitchFamily="34" charset="-122"/>
-                <a:cs typeface="Be Vietnam Pro" pitchFamily="34" charset="-120"/>
-              </a:rPr>
-              <a:t> độc</a:t>
-            </a:r>
-            <a:r>
-              <a:rPr lang="en-US" sz="1800" dirty="0" spc="0" kern="0">
-                <a:solidFill>
-                  <a:srgbClr val="9AA0B5"/>
-                </a:solidFill>
-                <a:latin typeface="Be Vietnam Pro" pitchFamily="34" charset="0"/>
-                <a:ea typeface="Be Vietnam Pro" pitchFamily="34" charset="-122"/>
-                <a:cs typeface="Be Vietnam Pro" pitchFamily="34" charset="-120"/>
-              </a:rPr>
-              <a:t> lập.</a:t>
             </a:r>
             <a:endParaRPr lang="en-US" sz="1800" dirty="0"/>
           </a:p>
@@ -9029,6 +8952,28 @@
               <a:buNone/>
             </a:pPr>
             <a:r>
+              <a:rPr lang="en-US" sz="2700" dirty="0" spc="58" kern="0">
+                <a:solidFill>
+                  <a:srgbClr val="14161C"/>
+                </a:solidFill>
+                <a:latin typeface="Be Vietnam Pro" pitchFamily="34" charset="0"/>
+                <a:ea typeface="Be Vietnam Pro" pitchFamily="34" charset="-122"/>
+                <a:cs typeface="Be Vietnam Pro" pitchFamily="34" charset="-120"/>
+              </a:rPr>
+              <a:t>Gửi</a:t>
+            </a:r>
+            <a:r>
+              <a:rPr lang="en-US" sz="2700" dirty="0" spc="-1" kern="0">
+                <a:solidFill>
+                  <a:srgbClr val="14161C"/>
+                </a:solidFill>
+                <a:latin typeface="Be Vietnam Pro" pitchFamily="34" charset="0"/>
+                <a:ea typeface="Be Vietnam Pro" pitchFamily="34" charset="-122"/>
+                <a:cs typeface="Be Vietnam Pro" pitchFamily="34" charset="-120"/>
+              </a:rPr>
+              <a:t> thẳng</a:t>
+            </a:r>
+            <a:r>
               <a:rPr lang="en-US" sz="2700" dirty="0" spc="-13" kern="0">
                 <a:solidFill>
                   <a:srgbClr val="14161C"/>
@@ -9037,7 +8982,18 @@
                 <a:ea typeface="Be Vietnam Pro" pitchFamily="34" charset="-122"/>
                 <a:cs typeface="Be Vietnam Pro" pitchFamily="34" charset="-120"/>
               </a:rPr>
-              <a:t>Đây</a:t>
+              <a:t> tới</a:t>
+            </a:r>
+            <a:r>
+              <a:rPr lang="en-US" sz="2700" dirty="0" spc="-12" kern="0">
+                <a:solidFill>
+                  <a:srgbClr val="14161C"/>
+                </a:solidFill>
+                <a:latin typeface="Be Vietnam Pro" pitchFamily="34" charset="0"/>
+                <a:ea typeface="Be Vietnam Pro" pitchFamily="34" charset="-122"/>
+                <a:cs typeface="Be Vietnam Pro" pitchFamily="34" charset="-120"/>
+              </a:rPr>
+              <a:t> máy</a:t>
             </a:r>
             <a:r>
               <a:rPr lang="en-US" sz="2700" dirty="0" spc="-1" kern="0">
@@ -9048,10 +9004,10 @@
                 <a:ea typeface="Be Vietnam Pro" pitchFamily="34" charset="-122"/>
                 <a:cs typeface="Be Vietnam Pro" pitchFamily="34" charset="-120"/>
               </a:rPr>
-              <a:t> là khi</a:t>
-            </a:r>
-            <a:r>
-              <a:rPr lang="en-US" sz="2700" dirty="0" spc="41" kern="0">
+              <a:t> chủ</a:t>
+            </a:r>
+            <a:r>
+              <a:rPr lang="en-US" sz="2700" dirty="0" spc="-13" kern="0">
                 <a:solidFill>
                   <a:srgbClr val="14161C"/>
                 </a:solidFill>
@@ -9059,7 +9015,40 @@
                 <a:ea typeface="Be Vietnam Pro" pitchFamily="34" charset="-122"/>
                 <a:cs typeface="Be Vietnam Pro" pitchFamily="34" charset="-120"/>
               </a:rPr>
-              <a:t> gửi</a:t>
+              <a:t> gốc;</a:t>
+            </a:r>
+            <a:r>
+              <a:rPr lang="en-US" sz="2700" dirty="0" spc="-1" kern="0">
+                <a:solidFill>
+                  <a:srgbClr val="14161C"/>
+                </a:solidFill>
+                <a:latin typeface="Be Vietnam Pro" pitchFamily="34" charset="0"/>
+                <a:ea typeface="Be Vietnam Pro" pitchFamily="34" charset="-122"/>
+                <a:cs typeface="Be Vietnam Pro" pitchFamily="34" charset="-120"/>
+              </a:rPr>
+              <a:t> qua</a:t>
+            </a:r>
+            <a:r>
+              <a:rPr lang="en-US" sz="2700" dirty="0" spc="-35" kern="0">
+                <a:solidFill>
+                  <a:srgbClr val="14161C"/>
+                </a:solidFill>
+                <a:latin typeface="Be Vietnam Pro" pitchFamily="34" charset="0"/>
+                <a:ea typeface="Be Vietnam Pro" pitchFamily="34" charset="-122"/>
+                <a:cs typeface="Be Vietnam Pro" pitchFamily="34" charset="-120"/>
+              </a:rPr>
+              <a:t> proxy</a:t>
+            </a:r>
+            <a:r>
+              <a:rPr lang="en-US" sz="2700" dirty="0" spc="-1" kern="0">
+                <a:solidFill>
+                  <a:srgbClr val="14161C"/>
+                </a:solidFill>
+                <a:latin typeface="Be Vietnam Pro" pitchFamily="34" charset="0"/>
+                <a:ea typeface="Be Vietnam Pro" pitchFamily="34" charset="-122"/>
+                <a:cs typeface="Be Vietnam Pro" pitchFamily="34" charset="-120"/>
+              </a:rPr>
+              <a:t> thì</a:t>
             </a:r>
             <a:r>
               <a:rPr lang="en-US" sz="2700" dirty="0" spc="0" kern="0">
@@ -9070,117 +9059,7 @@
                 <a:ea typeface="Be Vietnam Pro" pitchFamily="34" charset="-122"/>
                 <a:cs typeface="Be Vietnam Pro" pitchFamily="34" charset="-120"/>
               </a:rPr>
-              <a:t> thẳng</a:t>
-            </a:r>
-            <a:r>
-              <a:rPr lang="en-US" sz="2700" dirty="0" spc="-14" kern="0">
-                <a:solidFill>
-                  <a:srgbClr val="14161C"/>
-                </a:solidFill>
-                <a:latin typeface="Be Vietnam Pro" pitchFamily="34" charset="0"/>
-                <a:ea typeface="Be Vietnam Pro" pitchFamily="34" charset="-122"/>
-                <a:cs typeface="Be Vietnam Pro" pitchFamily="34" charset="-120"/>
-              </a:rPr>
-              <a:t> tới</a:t>
-            </a:r>
-            <a:r>
-              <a:rPr lang="en-US" sz="2700" dirty="0" spc="-12" kern="0">
-                <a:solidFill>
-                  <a:srgbClr val="14161C"/>
-                </a:solidFill>
-                <a:latin typeface="Be Vietnam Pro" pitchFamily="34" charset="0"/>
-                <a:ea typeface="Be Vietnam Pro" pitchFamily="34" charset="-122"/>
-                <a:cs typeface="Be Vietnam Pro" pitchFamily="34" charset="-120"/>
-              </a:rPr>
-              <a:t> máy</a:t>
-            </a:r>
-            <a:r>
-              <a:rPr lang="en-US" sz="2700" dirty="0" spc="-1" kern="0">
-                <a:solidFill>
-                  <a:srgbClr val="14161C"/>
-                </a:solidFill>
-                <a:latin typeface="Be Vietnam Pro" pitchFamily="34" charset="0"/>
-                <a:ea typeface="Be Vietnam Pro" pitchFamily="34" charset="-122"/>
-                <a:cs typeface="Be Vietnam Pro" pitchFamily="34" charset="-120"/>
-              </a:rPr>
-              <a:t> chủ</a:t>
-            </a:r>
-            <a:r>
-              <a:rPr lang="en-US" sz="2700" dirty="0" spc="-14" kern="0">
-                <a:solidFill>
-                  <a:srgbClr val="14161C"/>
-                </a:solidFill>
-                <a:latin typeface="Be Vietnam Pro" pitchFamily="34" charset="0"/>
-                <a:ea typeface="Be Vietnam Pro" pitchFamily="34" charset="-122"/>
-                <a:cs typeface="Be Vietnam Pro" pitchFamily="34" charset="-120"/>
-              </a:rPr>
-              <a:t> gốc.</a:t>
-            </a:r>
-            <a:r>
-              <a:rPr lang="en-US" sz="2700" dirty="0" spc="-3" kern="0">
-                <a:solidFill>
-                  <a:srgbClr val="14161C"/>
-                </a:solidFill>
-                <a:latin typeface="Be Vietnam Pro" pitchFamily="34" charset="0"/>
-                <a:ea typeface="Be Vietnam Pro" pitchFamily="34" charset="-122"/>
-                <a:cs typeface="Be Vietnam Pro" pitchFamily="34" charset="-120"/>
-              </a:rPr>
-              <a:t> Qua</a:t>
-            </a:r>
-            <a:r>
-              <a:rPr lang="en-US" sz="2700" dirty="0" spc="-29" kern="0">
-                <a:solidFill>
-                  <a:srgbClr val="14161C"/>
-                </a:solidFill>
-                <a:latin typeface="Be Vietnam Pro" pitchFamily="34" charset="0"/>
-                <a:ea typeface="Be Vietnam Pro" pitchFamily="34" charset="-122"/>
-                <a:cs typeface="Be Vietnam Pro" pitchFamily="34" charset="-120"/>
-              </a:rPr>
-              <a:t> proxy,</a:t>
-            </a:r>
-            <a:r>
-              <a:rPr lang="en-US" sz="2700" dirty="0" spc="-2" kern="0">
-                <a:solidFill>
-                  <a:srgbClr val="14161C"/>
-                </a:solidFill>
-                <a:latin typeface="Be Vietnam Pro" pitchFamily="34" charset="0"/>
-                <a:ea typeface="Be Vietnam Pro" pitchFamily="34" charset="-122"/>
-                <a:cs typeface="Be Vietnam Pro" pitchFamily="34" charset="-120"/>
-              </a:rPr>
-              <a:t> dòng</a:t>
-            </a:r>
-            <a:r>
-              <a:rPr lang="en-US" sz="2700" dirty="0" spc="13" kern="0">
-                <a:solidFill>
-                  <a:srgbClr val="14161C"/>
-                </a:solidFill>
-                <a:latin typeface="Be Vietnam Pro" pitchFamily="34" charset="0"/>
-                <a:ea typeface="Be Vietnam Pro" pitchFamily="34" charset="-122"/>
-                <a:cs typeface="Be Vietnam Pro" pitchFamily="34" charset="-120"/>
-              </a:rPr>
-              <a:t> đầu</a:t>
-            </a:r>
-            <a:r>
-              <a:rPr lang="en-US" sz="2700" dirty="0" spc="0" kern="0">
-                <a:solidFill>
-                  <a:srgbClr val="14161C"/>
-                </a:solidFill>
-                <a:latin typeface="Be Vietnam Pro" pitchFamily="34" charset="0"/>
-                <a:ea typeface="Be Vietnam Pro" pitchFamily="34" charset="-122"/>
-                <a:cs typeface="Be Vietnam Pro" pitchFamily="34" charset="-120"/>
-              </a:rPr>
-              <a:t> có</a:t>
-            </a:r>
-            <a:r>
-              <a:rPr lang="en-US" sz="2700" dirty="0" spc="-1" kern="0">
-                <a:solidFill>
-                  <a:srgbClr val="14161C"/>
-                </a:solidFill>
-                <a:latin typeface="Be Vietnam Pro" pitchFamily="34" charset="0"/>
-                <a:ea typeface="Be Vietnam Pro" pitchFamily="34" charset="-122"/>
-                <a:cs typeface="Be Vietnam Pro" pitchFamily="34" charset="-120"/>
-              </a:rPr>
-              <a:t> thể khác.</a:t>
+              <a:t> khác.</a:t>
             </a:r>
             <a:endParaRPr lang="en-US" sz="2700" dirty="0"/>
           </a:p>
@@ -9918,6 +9797,50 @@
               <a:t>Chỉ</a:t>
             </a:r>
             <a:r>
+              <a:rPr lang="en-US" sz="2850" dirty="0" spc="2" kern="0">
+                <a:solidFill>
+                  <a:srgbClr val="E4E1D8"/>
+                </a:solidFill>
+                <a:latin typeface="Be Vietnam Pro" pitchFamily="34" charset="0"/>
+                <a:ea typeface="Be Vietnam Pro" pitchFamily="34" charset="-122"/>
+                <a:cs typeface="Be Vietnam Pro" pitchFamily="34" charset="-120"/>
+              </a:rPr>
+              <a:t> cho</a:t>
+            </a:r>
+            <a:r>
+              <a:rPr lang="en-US" sz="2850" dirty="0" spc="9" kern="0">
+                <a:solidFill>
+                  <a:srgbClr val="E4E1D8"/>
+                </a:solidFill>
+                <a:latin typeface="Be Vietnam Pro" pitchFamily="34" charset="0"/>
+                <a:ea typeface="Be Vietnam Pro" pitchFamily="34" charset="-122"/>
+                <a:cs typeface="Be Vietnam Pro" pitchFamily="34" charset="-120"/>
+              </a:rPr>
+              <a:t> trình</a:t>
+            </a:r>
+            <a:r>
+              <a:rPr lang="en-US" sz="2850" dirty="0" spc="-19" kern="0">
+                <a:solidFill>
+                  <a:srgbClr val="E4E1D8"/>
+                </a:solidFill>
+                <a:latin typeface="Be Vietnam Pro" pitchFamily="34" charset="0"/>
+                <a:ea typeface="Be Vietnam Pro" pitchFamily="34" charset="-122"/>
+                <a:cs typeface="Be Vietnam Pro" pitchFamily="34" charset="-120"/>
+              </a:rPr>
+              <a:t> duyệt,</a:t>
+            </a:r>
+            <a:r>
+              <a:rPr lang="en-US" sz="2850" dirty="0" spc="3" kern="0">
+                <a:solidFill>
+                  <a:srgbClr val="E4E1D8"/>
+                </a:solidFill>
+                <a:latin typeface="Be Vietnam Pro" pitchFamily="34" charset="0"/>
+                <a:ea typeface="Be Vietnam Pro" pitchFamily="34" charset="-122"/>
+                <a:cs typeface="Be Vietnam Pro" pitchFamily="34" charset="-120"/>
+              </a:rPr>
+              <a:t> ví</a:t>
+            </a:r>
+            <a:r>
               <a:rPr lang="en-US" sz="2850" dirty="0" spc="-1" kern="0">
                 <a:solidFill>
                   <a:srgbClr val="E4E1D8"/>
@@ -9926,10 +9849,10 @@
                 <a:ea typeface="Be Vietnam Pro" pitchFamily="34" charset="-122"/>
                 <a:cs typeface="Be Vietnam Pro" pitchFamily="34" charset="-120"/>
               </a:rPr>
-              <a:t> dành</a:t>
-            </a:r>
-            <a:r>
-              <a:rPr lang="en-US" sz="2850" dirty="0" spc="2" kern="0">
+              <a:t> dụ cuộn</a:t>
+            </a:r>
+            <a:r>
+              <a:rPr lang="en-US" sz="2850" dirty="0" spc="-15" kern="0">
                 <a:solidFill>
                   <a:srgbClr val="E4E1D8"/>
                 </a:solidFill>
@@ -9937,76 +9860,10 @@
                 <a:ea typeface="Be Vietnam Pro" pitchFamily="34" charset="-122"/>
                 <a:cs typeface="Be Vietnam Pro" pitchFamily="34" charset="-120"/>
               </a:rPr>
-              <a:t> cho</a:t>
-            </a:r>
-            <a:r>
-              <a:rPr lang="en-US" sz="2850" dirty="0" spc="9" kern="0">
-                <a:solidFill>
-                  <a:srgbClr val="E4E1D8"/>
-                </a:solidFill>
-                <a:latin typeface="Be Vietnam Pro" pitchFamily="34" charset="0"/>
-                <a:ea typeface="Be Vietnam Pro" pitchFamily="34" charset="-122"/>
-                <a:cs typeface="Be Vietnam Pro" pitchFamily="34" charset="-120"/>
-              </a:rPr>
-              <a:t> trình</a:t>
-            </a:r>
-            <a:r>
-              <a:rPr lang="en-US" sz="2850" dirty="0" spc="-19" kern="0">
-                <a:solidFill>
-                  <a:srgbClr val="E4E1D8"/>
-                </a:solidFill>
-                <a:latin typeface="Be Vietnam Pro" pitchFamily="34" charset="0"/>
-                <a:ea typeface="Be Vietnam Pro" pitchFamily="34" charset="-122"/>
-                <a:cs typeface="Be Vietnam Pro" pitchFamily="34" charset="-120"/>
-              </a:rPr>
-              <a:t> duyệt,</a:t>
-            </a:r>
-            <a:r>
-              <a:rPr lang="en-US" sz="2850" dirty="0" spc="3" kern="0">
-                <a:solidFill>
-                  <a:srgbClr val="E4E1D8"/>
-                </a:solidFill>
-                <a:latin typeface="Be Vietnam Pro" pitchFamily="34" charset="0"/>
-                <a:ea typeface="Be Vietnam Pro" pitchFamily="34" charset="-122"/>
-                <a:cs typeface="Be Vietnam Pro" pitchFamily="34" charset="-120"/>
-              </a:rPr>
-              <a:t> ví</a:t>
-            </a:r>
-            <a:r>
-              <a:rPr lang="en-US" sz="2850" dirty="0" spc="-1" kern="0">
-                <a:solidFill>
-                  <a:srgbClr val="E4E1D8"/>
-                </a:solidFill>
-                <a:latin typeface="Be Vietnam Pro" pitchFamily="34" charset="0"/>
-                <a:ea typeface="Be Vietnam Pro" pitchFamily="34" charset="-122"/>
-                <a:cs typeface="Be Vietnam Pro" pitchFamily="34" charset="-120"/>
-              </a:rPr>
-              <a:t> dụ cuộn</a:t>
-            </a:r>
-            <a:r>
-              <a:rPr lang="en-US" sz="2850" dirty="0" spc="-15" kern="0">
-                <a:solidFill>
-                  <a:srgbClr val="E4E1D8"/>
-                </a:solidFill>
-                <a:latin typeface="Be Vietnam Pro" pitchFamily="34" charset="0"/>
-                <a:ea typeface="Be Vietnam Pro" pitchFamily="34" charset="-122"/>
-                <a:cs typeface="Be Vietnam Pro" pitchFamily="34" charset="-120"/>
-              </a:rPr>
               <a:t> tới</a:t>
             </a:r>
             <a:r>
-              <a:rPr lang="en-US" sz="2850" dirty="0" spc="-9" kern="0">
-                <a:solidFill>
-                  <a:srgbClr val="E4E1D8"/>
-                </a:solidFill>
-                <a:latin typeface="Be Vietnam Pro" pitchFamily="34" charset="0"/>
-                <a:ea typeface="Be Vietnam Pro" pitchFamily="34" charset="-122"/>
-                <a:cs typeface="Be Vietnam Pro" pitchFamily="34" charset="-120"/>
-              </a:rPr>
-              <a:t> một</a:t>
-            </a:r>
-            <a:r>
-              <a:rPr lang="en-US" sz="2850" dirty="0" spc="9" kern="0">
+              <a:rPr lang="en-US" sz="2850" dirty="0" spc="10" kern="0">
                 <a:solidFill>
                   <a:srgbClr val="E4E1D8"/>
                 </a:solidFill>
@@ -12589,7 +12446,7 @@
               <a:t> thông</a:t>
             </a:r>
             <a:r>
-              <a:rPr lang="en-US" sz="2550" b="1" dirty="0" spc="2" kern="0">
+              <a:rPr lang="en-US" sz="2550" b="1" dirty="0" spc="1" kern="0">
                 <a:solidFill>
                   <a:srgbClr val="14161C"/>
                 </a:solidFill>
@@ -12597,10 +12454,10 @@
                 <a:ea typeface="Be Vietnam Pro" pitchFamily="34" charset="-122"/>
                 <a:cs typeface="Be Vietnam Pro" pitchFamily="34" charset="-120"/>
               </a:rPr>
-              <a:t> tin</a:t>
-            </a:r>
-            <a:r>
-              <a:rPr lang="en-US" sz="2550" b="1" dirty="0" spc="3" kern="0">
+              <a:t> tin?</a:t>
+            </a:r>
+            <a:r>
+              <a:rPr lang="en-US" sz="2550" b="1" dirty="0" spc="13" kern="0">
                 <a:solidFill>
                   <a:srgbClr val="14161C"/>
                 </a:solidFill>
@@ -12608,10 +12465,10 @@
                 <a:ea typeface="Be Vietnam Pro" pitchFamily="34" charset="-122"/>
                 <a:cs typeface="Be Vietnam Pro" pitchFamily="34" charset="-120"/>
               </a:rPr>
-              <a:t> đó?</a:t>
-            </a:r>
-            <a:r>
-              <a:rPr lang="en-US" sz="2550" b="1" dirty="0" spc="13" kern="0">
+              <a:t> Đưa</a:t>
+            </a:r>
+            <a:r>
+              <a:rPr lang="en-US" sz="2550" b="1" dirty="0" spc="-11" kern="0">
                 <a:solidFill>
                   <a:srgbClr val="14161C"/>
                 </a:solidFill>
@@ -12619,10 +12476,10 @@
                 <a:ea typeface="Be Vietnam Pro" pitchFamily="34" charset="-122"/>
                 <a:cs typeface="Be Vietnam Pro" pitchFamily="34" charset="-120"/>
               </a:rPr>
-              <a:t> Đưa</a:t>
-            </a:r>
-            <a:r>
-              <a:rPr lang="en-US" sz="2550" b="1" dirty="0" spc="-11" kern="0">
+              <a:t> vào</a:t>
+            </a:r>
+            <a:r>
+              <a:rPr lang="en-US" sz="2550" b="1" dirty="0" spc="-5" kern="0">
                 <a:solidFill>
                   <a:srgbClr val="14161C"/>
                 </a:solidFill>
@@ -12630,21 +12487,10 @@
                 <a:ea typeface="Be Vietnam Pro" pitchFamily="34" charset="-122"/>
                 <a:cs typeface="Be Vietnam Pro" pitchFamily="34" charset="-120"/>
               </a:rPr>
-              <a:t> vào</a:t>
-            </a:r>
-            <a:r>
-              <a:rPr lang="en-US" sz="2550" b="1" dirty="0" spc="-4" kern="0">
-                <a:solidFill>
-                  <a:srgbClr val="14161C"/>
-                </a:solidFill>
-                <a:latin typeface="Be Vietnam Pro" pitchFamily="34" charset="0"/>
-                <a:ea typeface="Be Vietnam Pro" pitchFamily="34" charset="-122"/>
-                <a:cs typeface="Be Vietnam Pro" pitchFamily="34" charset="-120"/>
-              </a:rPr>
               <a:t> path</a:t>
             </a:r>
             <a:r>
-              <a:rPr lang="en-US" sz="2550" b="1" dirty="0" spc="-1" kern="0">
+              <a:rPr lang="en-US" sz="2550" b="1" dirty="0" spc="0" kern="0">
                 <a:solidFill>
                   <a:srgbClr val="14161C"/>
                 </a:solidFill>
@@ -15644,6 +15490,50 @@
               <a:buNone/>
             </a:pPr>
             <a:r>
+              <a:rPr lang="en-US" sz="2100" dirty="0" spc="0" kern="0">
+                <a:solidFill>
+                  <a:srgbClr val="6B6A66"/>
+                </a:solidFill>
+                <a:latin typeface="Be Vietnam Pro" pitchFamily="34" charset="0"/>
+                <a:ea typeface="Be Vietnam Pro" pitchFamily="34" charset="-122"/>
+                <a:cs typeface="Be Vietnam Pro" pitchFamily="34" charset="-120"/>
+              </a:rPr>
+              <a:t>Nguồn</a:t>
+            </a:r>
+            <a:r>
+              <a:rPr lang="en-US" sz="2100" dirty="0" spc="-1" kern="0">
+                <a:solidFill>
+                  <a:srgbClr val="6B6A66"/>
+                </a:solidFill>
+                <a:latin typeface="Be Vietnam Pro" pitchFamily="34" charset="0"/>
+                <a:ea typeface="Be Vietnam Pro" pitchFamily="34" charset="-122"/>
+                <a:cs typeface="Be Vietnam Pro" pitchFamily="34" charset="-120"/>
+              </a:rPr>
+              <a:t> chia</a:t>
+            </a:r>
+            <a:r>
+              <a:rPr lang="en-US" sz="2100" dirty="0" spc="-6" kern="0">
+                <a:solidFill>
+                  <a:srgbClr val="6B6A66"/>
+                </a:solidFill>
+                <a:latin typeface="Be Vietnam Pro" pitchFamily="34" charset="0"/>
+                <a:ea typeface="Be Vietnam Pro" pitchFamily="34" charset="-122"/>
+                <a:cs typeface="Be Vietnam Pro" pitchFamily="34" charset="-120"/>
+              </a:rPr>
+              <a:t> bốn</a:t>
+            </a:r>
+            <a:r>
+              <a:rPr lang="en-US" sz="2100" dirty="0" spc="-2" kern="0">
+                <a:solidFill>
+                  <a:srgbClr val="6B6A66"/>
+                </a:solidFill>
+                <a:latin typeface="Be Vietnam Pro" pitchFamily="34" charset="0"/>
+                <a:ea typeface="Be Vietnam Pro" pitchFamily="34" charset="-122"/>
+                <a:cs typeface="Be Vietnam Pro" pitchFamily="34" charset="-120"/>
+              </a:rPr>
+              <a:t> phần;</a:t>
+            </a:r>
+            <a:r>
               <a:rPr lang="en-US" sz="2100" dirty="0" spc="1" kern="0">
                 <a:solidFill>
                   <a:srgbClr val="6B6A66"/>
@@ -15652,7 +15542,18 @@
                 <a:ea typeface="Be Vietnam Pro" pitchFamily="34" charset="-122"/>
                 <a:cs typeface="Be Vietnam Pro" pitchFamily="34" charset="-120"/>
               </a:rPr>
-              <a:t>Bài</a:t>
+              <a:t> hình</a:t>
+            </a:r>
+            <a:r>
+              <a:rPr lang="en-US" sz="2100" dirty="0" spc="-10" kern="0">
+                <a:solidFill>
+                  <a:srgbClr val="6B6A66"/>
+                </a:solidFill>
+                <a:latin typeface="Be Vietnam Pro" pitchFamily="34" charset="0"/>
+                <a:ea typeface="Be Vietnam Pro" pitchFamily="34" charset="-122"/>
+                <a:cs typeface="Be Vietnam Pro" pitchFamily="34" charset="-120"/>
+              </a:rPr>
+              <a:t> này</a:t>
             </a:r>
             <a:r>
               <a:rPr lang="en-US" sz="2100" dirty="0" spc="0" kern="0">
@@ -15663,10 +15564,10 @@
                 <a:ea typeface="Be Vietnam Pro" pitchFamily="34" charset="-122"/>
                 <a:cs typeface="Be Vietnam Pro" pitchFamily="34" charset="-120"/>
               </a:rPr>
-              <a:t> nguồn</a:t>
-            </a:r>
-            <a:r>
-              <a:rPr lang="en-US" sz="2100" dirty="0" spc="-1" kern="0">
+              <a:t> dùng</a:t>
+            </a:r>
+            <a:r>
+              <a:rPr lang="en-US" sz="2100" dirty="0" spc="-9" kern="0">
                 <a:solidFill>
                   <a:srgbClr val="6B6A66"/>
                 </a:solidFill>
@@ -15674,7 +15575,18 @@
                 <a:ea typeface="Be Vietnam Pro" pitchFamily="34" charset="-122"/>
                 <a:cs typeface="Be Vietnam Pro" pitchFamily="34" charset="-120"/>
               </a:rPr>
-              <a:t> chia URL</a:t>
+              <a:t> một</a:t>
+            </a:r>
+            <a:r>
+              <a:rPr lang="en-US" sz="2100" dirty="0" spc="0" kern="0">
+                <a:solidFill>
+                  <a:srgbClr val="6B6A66"/>
+                </a:solidFill>
+                <a:latin typeface="Be Vietnam Pro" pitchFamily="34" charset="0"/>
+                <a:ea typeface="Be Vietnam Pro" pitchFamily="34" charset="-122"/>
+                <a:cs typeface="Be Vietnam Pro" pitchFamily="34" charset="-120"/>
+              </a:rPr>
+              <a:t> ví</a:t>
             </a:r>
             <a:r>
               <a:rPr lang="en-US" sz="2100" dirty="0" spc="-2" kern="0">
@@ -15685,161 +15597,7 @@
                 <a:ea typeface="Be Vietnam Pro" pitchFamily="34" charset="-122"/>
                 <a:cs typeface="Be Vietnam Pro" pitchFamily="34" charset="-120"/>
               </a:rPr>
-              <a:t> thành</a:t>
-            </a:r>
-            <a:r>
-              <a:rPr lang="en-US" sz="2100" dirty="0" spc="-5" kern="0">
-                <a:solidFill>
-                  <a:srgbClr val="6B6A66"/>
-                </a:solidFill>
-                <a:latin typeface="Be Vietnam Pro" pitchFamily="34" charset="0"/>
-                <a:ea typeface="Be Vietnam Pro" pitchFamily="34" charset="-122"/>
-                <a:cs typeface="Be Vietnam Pro" pitchFamily="34" charset="-120"/>
-              </a:rPr>
-              <a:t> bốn</a:t>
-            </a:r>
-            <a:r>
-              <a:rPr lang="en-US" sz="2100" dirty="0" spc="-2" kern="0">
-                <a:solidFill>
-                  <a:srgbClr val="6B6A66"/>
-                </a:solidFill>
-                <a:latin typeface="Be Vietnam Pro" pitchFamily="34" charset="0"/>
-                <a:ea typeface="Be Vietnam Pro" pitchFamily="34" charset="-122"/>
-                <a:cs typeface="Be Vietnam Pro" pitchFamily="34" charset="-120"/>
-              </a:rPr>
-              <a:t> phần,</a:t>
-            </a:r>
-            <a:r>
-              <a:rPr lang="en-US" sz="2100" dirty="0" spc="-1" kern="0">
-                <a:solidFill>
-                  <a:srgbClr val="6B6A66"/>
-                </a:solidFill>
-                <a:latin typeface="Be Vietnam Pro" pitchFamily="34" charset="0"/>
-                <a:ea typeface="Be Vietnam Pro" pitchFamily="34" charset="-122"/>
-                <a:cs typeface="Be Vietnam Pro" pitchFamily="34" charset="-120"/>
-              </a:rPr>
-              <a:t> dùng</a:t>
-            </a:r>
-            <a:r>
-              <a:rPr lang="en-US" sz="2100" dirty="0" spc="4" kern="0">
-                <a:solidFill>
-                  <a:srgbClr val="6B6A66"/>
-                </a:solidFill>
-                <a:latin typeface="Be Vietnam Pro" pitchFamily="34" charset="0"/>
-                <a:ea typeface="Be Vietnam Pro" pitchFamily="34" charset="-122"/>
-                <a:cs typeface="Be Vietnam Pro" pitchFamily="34" charset="-120"/>
-              </a:rPr>
-              <a:t> đường</a:t>
-            </a:r>
-            <a:r>
-              <a:rPr lang="en-US" sz="2100" dirty="0" spc="-2" kern="0">
-                <a:solidFill>
-                  <a:srgbClr val="6B6A66"/>
-                </a:solidFill>
-                <a:latin typeface="Be Vietnam Pro" pitchFamily="34" charset="0"/>
-                <a:ea typeface="Be Vietnam Pro" pitchFamily="34" charset="-122"/>
-                <a:cs typeface="Be Vietnam Pro" pitchFamily="34" charset="-120"/>
-              </a:rPr>
-              <a:t> dẫn</a:t>
-            </a:r>
-            <a:r>
-              <a:rPr lang="en-US" sz="2100" dirty="0" spc="-1" kern="0">
-                <a:solidFill>
-                  <a:srgbClr val="6B6A66"/>
-                </a:solidFill>
-                <a:latin typeface="Be Vietnam Pro" pitchFamily="34" charset="0"/>
-                <a:ea typeface="Be Vietnam Pro" pitchFamily="34" charset="-122"/>
-                <a:cs typeface="Be Vietnam Pro" pitchFamily="34" charset="-120"/>
-              </a:rPr>
-              <a:t> khác;</a:t>
-            </a:r>
-            <a:r>
-              <a:rPr lang="en-US" sz="2100" dirty="0" spc="0" kern="0">
-                <a:solidFill>
-                  <a:srgbClr val="6B6A66"/>
-                </a:solidFill>
-                <a:latin typeface="Be Vietnam Pro" pitchFamily="34" charset="0"/>
-                <a:ea typeface="Be Vietnam Pro" pitchFamily="34" charset="-122"/>
-                <a:cs typeface="Be Vietnam Pro" pitchFamily="34" charset="-120"/>
-              </a:rPr>
-              <a:t> hình</a:t>
-            </a:r>
-            <a:r>
-              <a:rPr lang="en-US" sz="2100" dirty="0" spc="-9" kern="0">
-                <a:solidFill>
-                  <a:srgbClr val="6B6A66"/>
-                </a:solidFill>
-                <a:latin typeface="Be Vietnam Pro" pitchFamily="34" charset="0"/>
-                <a:ea typeface="Be Vietnam Pro" pitchFamily="34" charset="-122"/>
-                <a:cs typeface="Be Vietnam Pro" pitchFamily="34" charset="-120"/>
-              </a:rPr>
-              <a:t> này</a:t>
-            </a:r>
-            <a:r>
-              <a:rPr lang="en-US" sz="2100" dirty="0" spc="-1" kern="0">
-                <a:solidFill>
-                  <a:srgbClr val="6B6A66"/>
-                </a:solidFill>
-                <a:latin typeface="Be Vietnam Pro" pitchFamily="34" charset="0"/>
-                <a:ea typeface="Be Vietnam Pro" pitchFamily="34" charset="-122"/>
-                <a:cs typeface="Be Vietnam Pro" pitchFamily="34" charset="-120"/>
-              </a:rPr>
-              <a:t> dùng</a:t>
-            </a:r>
-            <a:r>
-              <a:rPr lang="en-US" sz="2100" dirty="0" spc="-8" kern="0">
-                <a:solidFill>
-                  <a:srgbClr val="6B6A66"/>
-                </a:solidFill>
-                <a:latin typeface="Be Vietnam Pro" pitchFamily="34" charset="0"/>
-                <a:ea typeface="Be Vietnam Pro" pitchFamily="34" charset="-122"/>
-                <a:cs typeface="Be Vietnam Pro" pitchFamily="34" charset="-120"/>
-              </a:rPr>
-              <a:t> một</a:t>
-            </a:r>
-            <a:r>
-              <a:rPr lang="en-US" sz="2100" dirty="0" spc="-1" kern="0">
-                <a:solidFill>
-                  <a:srgbClr val="6B6A66"/>
-                </a:solidFill>
-                <a:latin typeface="Be Vietnam Pro" pitchFamily="34" charset="0"/>
-                <a:ea typeface="Be Vietnam Pro" pitchFamily="34" charset="-122"/>
-                <a:cs typeface="Be Vietnam Pro" pitchFamily="34" charset="-120"/>
-              </a:rPr>
-              <a:t> ví</a:t>
-            </a:r>
-            <a:r>
-              <a:rPr lang="en-US" sz="2100" dirty="0" spc="-2" kern="0">
-                <a:solidFill>
-                  <a:srgbClr val="6B6A66"/>
-                </a:solidFill>
-                <a:latin typeface="Be Vietnam Pro" pitchFamily="34" charset="0"/>
-                <a:ea typeface="Be Vietnam Pro" pitchFamily="34" charset="-122"/>
-                <a:cs typeface="Be Vietnam Pro" pitchFamily="34" charset="-120"/>
-              </a:rPr>
-              <a:t> dụ</a:t>
-            </a:r>
-            <a:r>
-              <a:rPr lang="en-US" sz="2100" dirty="0" spc="-10" kern="0">
-                <a:solidFill>
-                  <a:srgbClr val="6B6A66"/>
-                </a:solidFill>
-                <a:latin typeface="Be Vietnam Pro" pitchFamily="34" charset="0"/>
-                <a:ea typeface="Be Vietnam Pro" pitchFamily="34" charset="-122"/>
-                <a:cs typeface="Be Vietnam Pro" pitchFamily="34" charset="-120"/>
-              </a:rPr>
-              <a:t> nhất</a:t>
-            </a:r>
-            <a:r>
-              <a:rPr lang="en-US" sz="2100" dirty="0" spc="-1" kern="0">
-                <a:solidFill>
-                  <a:srgbClr val="6B6A66"/>
-                </a:solidFill>
-                <a:latin typeface="Be Vietnam Pro" pitchFamily="34" charset="0"/>
-                <a:ea typeface="Be Vietnam Pro" pitchFamily="34" charset="-122"/>
-                <a:cs typeface="Be Vietnam Pro" pitchFamily="34" charset="-120"/>
-              </a:rPr>
-              <a:t> quán.</a:t>
+              <a:t> dụ.</a:t>
             </a:r>
             <a:endParaRPr lang="en-US" sz="2100" dirty="0"/>
           </a:p>

--- a/system-design-101/vi/lessons/sd-05-003/slides/sd-05-003.pptx
+++ b/system-design-101/vi/lessons/sd-05-003/slides/sd-05-003.pptx
@@ -2941,7 +2941,145 @@
       </p:sp>
       <p:sp>
         <p:nvSpPr>
-          <p:cNvPr id="24" name="Shape 22"/>
+          <p:cNvPr id="24" name="Text 22"/>
+          <p:cNvSpPr/>
+          <p:nvPr/>
+        </p:nvSpPr>
+        <p:spPr>
+          <a:xfrm>
+            <a:off x="14725650" y="5524500"/>
+            <a:ext cx="2647950" cy="342900"/>
+          </a:xfrm>
+          <a:prstGeom prst="rect">
+            <a:avLst/>
+          </a:prstGeom>
+          <a:noFill/>
+          <a:ln/>
+        </p:spPr>
+        <p:txBody>
+          <a:bodyPr wrap="square" lIns="0" tIns="0" rIns="0" bIns="0" rtlCol="0" anchor="t"/>
+          <a:lstStyle/>
+          <a:p>
+            <a:pPr algn="ctr" indent="0" marL="0">
+              <a:buNone/>
+            </a:pPr>
+            <a:r>
+              <a:rPr lang="en-US" sz="1800" b="1" spc="142" kern="0" dirty="0">
+                <a:solidFill>
+                  <a:srgbClr val="9AA0B5"/>
+                </a:solidFill>
+                <a:latin typeface="Be Vietnam Pro" pitchFamily="34" charset="0"/>
+                <a:ea typeface="Be Vietnam Pro" pitchFamily="34" charset="-122"/>
+                <a:cs typeface="Be Vietnam Pro" pitchFamily="34" charset="-120"/>
+              </a:rPr>
+              <a:t>thông</a:t>
+            </a:r>
+            <a:r>
+              <a:rPr lang="en-US" sz="1800" b="1" spc="159" kern="0" dirty="0">
+                <a:solidFill>
+                  <a:srgbClr val="9AA0B5"/>
+                </a:solidFill>
+                <a:latin typeface="Be Vietnam Pro" pitchFamily="34" charset="0"/>
+                <a:ea typeface="Be Vietnam Pro" pitchFamily="34" charset="-122"/>
+                <a:cs typeface="Be Vietnam Pro" pitchFamily="34" charset="-120"/>
+              </a:rPr>
+              <a:t> điệp</a:t>
+            </a:r>
+            <a:endParaRPr lang="en-US" sz="1800" dirty="0"/>
+          </a:p>
+        </p:txBody>
+      </p:sp>
+      <p:sp>
+        <p:nvSpPr>
+          <p:cNvPr id="25" name="Shape 23"/>
+          <p:cNvSpPr/>
+          <p:nvPr/>
+        </p:nvSpPr>
+        <p:spPr>
+          <a:xfrm>
+            <a:off x="14725650" y="5953125"/>
+            <a:ext cx="2647950" cy="914400"/>
+          </a:xfrm>
+          <a:prstGeom prst="roundRect">
+            <a:avLst>
+              <a:gd name="adj" fmla="val 20833"/>
+            </a:avLst>
+          </a:prstGeom>
+          <a:solidFill>
+            <a:srgbClr val="1E212B"/>
+          </a:solidFill>
+          <a:ln w="28575">
+            <a:solidFill>
+              <a:srgbClr val="3DD6A0"/>
+            </a:solidFill>
+            <a:prstDash val="solid"/>
+          </a:ln>
+        </p:spPr>
+      </p:sp>
+      <p:sp>
+        <p:nvSpPr>
+          <p:cNvPr id="26" name="Text 24"/>
+          <p:cNvSpPr/>
+          <p:nvPr/>
+        </p:nvSpPr>
+        <p:spPr>
+          <a:xfrm>
+            <a:off x="14820900" y="5953125"/>
+            <a:ext cx="2457450" cy="914400"/>
+          </a:xfrm>
+          <a:prstGeom prst="rect">
+            <a:avLst/>
+          </a:prstGeom>
+          <a:noFill/>
+          <a:ln/>
+        </p:spPr>
+        <p:txBody>
+          <a:bodyPr wrap="square" lIns="0" tIns="0" rIns="0" bIns="0" rtlCol="0" anchor="ctr"/>
+          <a:lstStyle/>
+          <a:p>
+            <a:pPr algn="ctr" indent="0" marL="0">
+              <a:buNone/>
+            </a:pPr>
+            <a:r>
+              <a:rPr lang="en-US" sz="2100" b="1" dirty="0" spc="-10" kern="0">
+                <a:solidFill>
+                  <a:srgbClr val="3DD6A0"/>
+                </a:solidFill>
+                <a:latin typeface="Be Vietnam Pro" pitchFamily="34" charset="0"/>
+                <a:ea typeface="Be Vietnam Pro" pitchFamily="34" charset="-122"/>
+                <a:cs typeface="Be Vietnam Pro" pitchFamily="34" charset="-120"/>
+              </a:rPr>
+              <a:t>dòng</a:t>
+            </a:r>
+            <a:r>
+              <a:rPr lang="en-US" sz="2100" b="1" dirty="0" spc="7" kern="0">
+                <a:solidFill>
+                  <a:srgbClr val="3DD6A0"/>
+                </a:solidFill>
+                <a:latin typeface="Be Vietnam Pro" pitchFamily="34" charset="0"/>
+                <a:ea typeface="Be Vietnam Pro" pitchFamily="34" charset="-122"/>
+                <a:cs typeface="Be Vietnam Pro" pitchFamily="34" charset="-120"/>
+              </a:rPr>
+              <a:t> đầu</a:t>
+            </a:r>
+            <a:r>
+              <a:rPr lang="en-US" sz="2100" b="1" dirty="0" spc="-5" kern="0">
+                <a:solidFill>
+                  <a:srgbClr val="3DD6A0"/>
+                </a:solidFill>
+                <a:latin typeface="Be Vietnam Pro" pitchFamily="34" charset="0"/>
+                <a:ea typeface="Be Vietnam Pro" pitchFamily="34" charset="-122"/>
+                <a:cs typeface="Be Vietnam Pro" pitchFamily="34" charset="-120"/>
+              </a:rPr>
+              <a:t> + header</a:t>
+            </a:r>
+            <a:endParaRPr lang="en-US" sz="2100" dirty="0"/>
+          </a:p>
+        </p:txBody>
+      </p:sp>
+      <p:sp>
+        <p:nvSpPr>
+          <p:cNvPr id="27" name="Shape 25"/>
           <p:cNvSpPr/>
           <p:nvPr/>
         </p:nvSpPr>
@@ -2965,7 +3103,7 @@
       </p:sp>
       <p:pic>
         <p:nvPicPr>
-          <p:cNvPr id="25" name="Moda image moda-export-watermark-cf3e5613-fad0-4a95-b907-2c5d8a98c7d3" descr="">    </p:cNvPr>
+          <p:cNvPr id="28" name="Moda image moda-export-watermark-cf3e5613-fad0-4a95-b907-2c5d8a98c7d3" descr="">    </p:cNvPr>
           <p:cNvPicPr>
             <a:picLocks noChangeAspect="1"/>
           </p:cNvPicPr>
